--- a/AI_Operations_Assistant_Using_Agentic_AI_Ajay_Kumar_Presentation.pptx
+++ b/AI_Operations_Assistant_Using_Agentic_AI_Ajay_Kumar_Presentation.pptx
@@ -362,7 +362,7 @@
           <a:p>
             <a:fld id="{5BCAD085-E8A6-8845-BD4E-CB4CCA059FC4}" type="datetimeFigureOut">
               <a:rPr lang="en-US" smtClean="0"/>
-              <a:t>8/30/2026</a:t>
+              <a:t>9/13/2026</a:t>
             </a:fld>
             <a:endParaRPr lang="en-US"/>
           </a:p>
@@ -709,7 +709,7 @@
           <a:p>
             <a:fld id="{5BCAD085-E8A6-8845-BD4E-CB4CCA059FC4}" type="datetimeFigureOut">
               <a:rPr lang="en-US" smtClean="0"/>
-              <a:t>8/30/2026</a:t>
+              <a:t>9/13/2026</a:t>
             </a:fld>
             <a:endParaRPr lang="en-US"/>
           </a:p>
@@ -1023,7 +1023,7 @@
           <a:p>
             <a:fld id="{5BCAD085-E8A6-8845-BD4E-CB4CCA059FC4}" type="datetimeFigureOut">
               <a:rPr lang="en-US" smtClean="0"/>
-              <a:t>8/30/2026</a:t>
+              <a:t>9/13/2026</a:t>
             </a:fld>
             <a:endParaRPr lang="en-US"/>
           </a:p>
@@ -1286,7 +1286,7 @@
           <a:p>
             <a:fld id="{5BCAD085-E8A6-8845-BD4E-CB4CCA059FC4}" type="datetimeFigureOut">
               <a:rPr lang="en-US" smtClean="0"/>
-              <a:t>8/30/2026</a:t>
+              <a:t>9/13/2026</a:t>
             </a:fld>
             <a:endParaRPr lang="en-US"/>
           </a:p>
@@ -1605,7 +1605,7 @@
           <a:p>
             <a:fld id="{5BCAD085-E8A6-8845-BD4E-CB4CCA059FC4}" type="datetimeFigureOut">
               <a:rPr lang="en-US" smtClean="0"/>
-              <a:t>8/30/2026</a:t>
+              <a:t>9/13/2026</a:t>
             </a:fld>
             <a:endParaRPr lang="en-US"/>
           </a:p>
@@ -1926,7 +1926,7 @@
           <a:p>
             <a:fld id="{5BCAD085-E8A6-8845-BD4E-CB4CCA059FC4}" type="datetimeFigureOut">
               <a:rPr lang="en-US" smtClean="0"/>
-              <a:t>8/30/2026</a:t>
+              <a:t>9/13/2026</a:t>
             </a:fld>
             <a:endParaRPr lang="en-US"/>
           </a:p>
@@ -2235,7 +2235,7 @@
           <a:p>
             <a:fld id="{5BCAD085-E8A6-8845-BD4E-CB4CCA059FC4}" type="datetimeFigureOut">
               <a:rPr lang="en-US" smtClean="0"/>
-              <a:t>8/30/2026</a:t>
+              <a:t>9/13/2026</a:t>
             </a:fld>
             <a:endParaRPr lang="en-US"/>
           </a:p>
@@ -2742,7 +2742,7 @@
           <a:p>
             <a:fld id="{5BCAD085-E8A6-8845-BD4E-CB4CCA059FC4}" type="datetimeFigureOut">
               <a:rPr lang="en-US" smtClean="0"/>
-              <a:t>8/30/2026</a:t>
+              <a:t>9/13/2026</a:t>
             </a:fld>
             <a:endParaRPr lang="en-US"/>
           </a:p>
@@ -2987,7 +2987,7 @@
           <a:p>
             <a:fld id="{5BCAD085-E8A6-8845-BD4E-CB4CCA059FC4}" type="datetimeFigureOut">
               <a:rPr lang="en-US" smtClean="0"/>
-              <a:t>8/30/2026</a:t>
+              <a:t>9/13/2026</a:t>
             </a:fld>
             <a:endParaRPr lang="en-US"/>
           </a:p>
@@ -3346,7 +3346,7 @@
           <a:p>
             <a:fld id="{5BCAD085-E8A6-8845-BD4E-CB4CCA059FC4}" type="datetimeFigureOut">
               <a:rPr lang="en-US" smtClean="0"/>
-              <a:t>8/30/2026</a:t>
+              <a:t>9/13/2026</a:t>
             </a:fld>
             <a:endParaRPr lang="en-US"/>
           </a:p>
@@ -3838,7 +3838,7 @@
           <a:p>
             <a:fld id="{5BCAD085-E8A6-8845-BD4E-CB4CCA059FC4}" type="datetimeFigureOut">
               <a:rPr lang="en-US" smtClean="0"/>
-              <a:t>8/30/2026</a:t>
+              <a:t>9/13/2026</a:t>
             </a:fld>
             <a:endParaRPr lang="en-US"/>
           </a:p>
@@ -4114,7 +4114,7 @@
           <a:p>
             <a:fld id="{5BCAD085-E8A6-8845-BD4E-CB4CCA059FC4}" type="datetimeFigureOut">
               <a:rPr lang="en-US" smtClean="0"/>
-              <a:t>8/30/2026</a:t>
+              <a:t>9/13/2026</a:t>
             </a:fld>
             <a:endParaRPr lang="en-US"/>
           </a:p>
@@ -4449,7 +4449,7 @@
           <a:p>
             <a:fld id="{5BCAD085-E8A6-8845-BD4E-CB4CCA059FC4}" type="datetimeFigureOut">
               <a:rPr lang="en-US" smtClean="0"/>
-              <a:t>8/30/2026</a:t>
+              <a:t>9/13/2026</a:t>
             </a:fld>
             <a:endParaRPr lang="en-US"/>
           </a:p>
@@ -4794,7 +4794,7 @@
           <a:p>
             <a:fld id="{5BCAD085-E8A6-8845-BD4E-CB4CCA059FC4}" type="datetimeFigureOut">
               <a:rPr lang="en-US" smtClean="0"/>
-              <a:t>8/30/2026</a:t>
+              <a:t>9/13/2026</a:t>
             </a:fld>
             <a:endParaRPr lang="en-US"/>
           </a:p>
@@ -5047,7 +5047,7 @@
           <a:p>
             <a:fld id="{5BCAD085-E8A6-8845-BD4E-CB4CCA059FC4}" type="datetimeFigureOut">
               <a:rPr lang="en-US" smtClean="0"/>
-              <a:t>8/30/2026</a:t>
+              <a:t>9/13/2026</a:t>
             </a:fld>
             <a:endParaRPr lang="en-US"/>
           </a:p>
@@ -5370,7 +5370,7 @@
           <a:p>
             <a:fld id="{5BCAD085-E8A6-8845-BD4E-CB4CCA059FC4}" type="datetimeFigureOut">
               <a:rPr lang="en-US" smtClean="0"/>
-              <a:t>8/30/2026</a:t>
+              <a:t>9/13/2026</a:t>
             </a:fld>
             <a:endParaRPr lang="en-US"/>
           </a:p>
@@ -5834,7 +5834,7 @@
           <a:p>
             <a:fld id="{5BCAD085-E8A6-8845-BD4E-CB4CCA059FC4}" type="datetimeFigureOut">
               <a:rPr lang="en-US" smtClean="0"/>
-              <a:t>8/30/2026</a:t>
+              <a:t>9/13/2026</a:t>
             </a:fld>
             <a:endParaRPr lang="en-US"/>
           </a:p>
@@ -5947,7 +5947,7 @@
           <a:p>
             <a:fld id="{5BCAD085-E8A6-8845-BD4E-CB4CCA059FC4}" type="datetimeFigureOut">
               <a:rPr lang="en-US" smtClean="0"/>
-              <a:t>8/30/2026</a:t>
+              <a:t>9/13/2026</a:t>
             </a:fld>
             <a:endParaRPr lang="en-US"/>
           </a:p>
@@ -6180,7 +6180,7 @@
           <a:p>
             <a:fld id="{5BCAD085-E8A6-8845-BD4E-CB4CCA059FC4}" type="datetimeFigureOut">
               <a:rPr lang="en-US" smtClean="0"/>
-              <a:t>8/30/2026</a:t>
+              <a:t>9/13/2026</a:t>
             </a:fld>
             <a:endParaRPr lang="en-US"/>
           </a:p>
@@ -6550,7 +6550,7 @@
           <a:p>
             <a:fld id="{5BCAD085-E8A6-8845-BD4E-CB4CCA059FC4}" type="datetimeFigureOut">
               <a:rPr lang="en-US" smtClean="0"/>
-              <a:t>8/30/2026</a:t>
+              <a:t>9/13/2026</a:t>
             </a:fld>
             <a:endParaRPr lang="en-US"/>
           </a:p>
@@ -6867,7 +6867,7 @@
           <a:p>
             <a:fld id="{5BCAD085-E8A6-8845-BD4E-CB4CCA059FC4}" type="datetimeFigureOut">
               <a:rPr lang="en-US" smtClean="0"/>
-              <a:t>8/30/2026</a:t>
+              <a:t>9/13/2026</a:t>
             </a:fld>
             <a:endParaRPr lang="en-US"/>
           </a:p>
@@ -7035,7 +7035,7 @@
           <a:p>
             <a:fld id="{5BCAD085-E8A6-8845-BD4E-CB4CCA059FC4}" type="datetimeFigureOut">
               <a:rPr lang="en-US" smtClean="0"/>
-              <a:t>8/30/2026</a:t>
+              <a:t>9/13/2026</a:t>
             </a:fld>
             <a:endParaRPr lang="en-US"/>
           </a:p>
@@ -7464,7 +7464,7 @@
           <a:p>
             <a:fld id="{5BCAD085-E8A6-8845-BD4E-CB4CCA059FC4}" type="datetimeFigureOut">
               <a:rPr lang="en-US" smtClean="0"/>
-              <a:t>8/30/2026</a:t>
+              <a:t>9/13/2026</a:t>
             </a:fld>
             <a:endParaRPr lang="en-US"/>
           </a:p>
@@ -7798,7 +7798,7 @@
           <a:p>
             <a:fld id="{5BCAD085-E8A6-8845-BD4E-CB4CCA059FC4}" type="datetimeFigureOut">
               <a:rPr lang="en-US" smtClean="0"/>
-              <a:t>8/30/2026</a:t>
+              <a:t>9/13/2026</a:t>
             </a:fld>
             <a:endParaRPr lang="en-US"/>
           </a:p>
@@ -8012,7 +8012,7 @@
           <a:p>
             <a:fld id="{5BCAD085-E8A6-8845-BD4E-CB4CCA059FC4}" type="datetimeFigureOut">
               <a:rPr lang="en-US" smtClean="0"/>
-              <a:t>8/30/2026</a:t>
+              <a:t>9/13/2026</a:t>
             </a:fld>
             <a:endParaRPr lang="en-US"/>
           </a:p>
@@ -8514,7 +8514,7 @@
           <a:p>
             <a:fld id="{5BCAD085-E8A6-8845-BD4E-CB4CCA059FC4}" type="datetimeFigureOut">
               <a:rPr lang="en-US" smtClean="0"/>
-              <a:t>8/30/2026</a:t>
+              <a:t>9/13/2026</a:t>
             </a:fld>
             <a:endParaRPr lang="en-US"/>
           </a:p>
@@ -8938,7 +8938,7 @@
           <a:p>
             <a:fld id="{5BCAD085-E8A6-8845-BD4E-CB4CCA059FC4}" type="datetimeFigureOut">
               <a:rPr lang="en-US" smtClean="0"/>
-              <a:t>8/30/2026</a:t>
+              <a:t>9/13/2026</a:t>
             </a:fld>
             <a:endParaRPr lang="en-US"/>
           </a:p>
@@ -9481,7 +9481,7 @@
           <a:p>
             <a:fld id="{5BCAD085-E8A6-8845-BD4E-CB4CCA059FC4}" type="datetimeFigureOut">
               <a:rPr lang="en-US" smtClean="0"/>
-              <a:t>8/30/2026</a:t>
+              <a:t>9/13/2026</a:t>
             </a:fld>
             <a:endParaRPr lang="en-US"/>
           </a:p>
@@ -10203,7 +10203,7 @@
           <a:p>
             <a:fld id="{5BCAD085-E8A6-8845-BD4E-CB4CCA059FC4}" type="datetimeFigureOut">
               <a:rPr lang="en-US" smtClean="0"/>
-              <a:t>8/30/2026</a:t>
+              <a:t>9/13/2026</a:t>
             </a:fld>
             <a:endParaRPr lang="en-US"/>
           </a:p>
@@ -10571,7 +10571,7 @@
           <a:p>
             <a:fld id="{5BCAD085-E8A6-8845-BD4E-CB4CCA059FC4}" type="datetimeFigureOut">
               <a:rPr lang="en-US" smtClean="0"/>
-              <a:t>8/30/2026</a:t>
+              <a:t>9/13/2026</a:t>
             </a:fld>
             <a:endParaRPr lang="en-US"/>
           </a:p>
@@ -10789,7 +10789,7 @@
           <a:p>
             <a:fld id="{5BCAD085-E8A6-8845-BD4E-CB4CCA059FC4}" type="datetimeFigureOut">
               <a:rPr lang="en-US" smtClean="0"/>
-              <a:t>8/30/2026</a:t>
+              <a:t>9/13/2026</a:t>
             </a:fld>
             <a:endParaRPr lang="en-US"/>
           </a:p>
@@ -11269,7 +11269,7 @@
           <a:p>
             <a:fld id="{5BCAD085-E8A6-8845-BD4E-CB4CCA059FC4}" type="datetimeFigureOut">
               <a:rPr lang="en-US" smtClean="0"/>
-              <a:t>8/30/2026</a:t>
+              <a:t>9/13/2026</a:t>
             </a:fld>
             <a:endParaRPr lang="en-US"/>
           </a:p>
@@ -11586,7 +11586,7 @@
           <a:p>
             <a:fld id="{5BCAD085-E8A6-8845-BD4E-CB4CCA059FC4}" type="datetimeFigureOut">
               <a:rPr lang="en-US" smtClean="0"/>
-              <a:t>8/30/2026</a:t>
+              <a:t>9/13/2026</a:t>
             </a:fld>
             <a:endParaRPr lang="en-US"/>
           </a:p>
@@ -12045,7 +12045,7 @@
           <a:p>
             <a:fld id="{5BCAD085-E8A6-8845-BD4E-CB4CCA059FC4}" type="datetimeFigureOut">
               <a:rPr lang="en-US" smtClean="0"/>
-              <a:t>8/30/2026</a:t>
+              <a:t>9/13/2026</a:t>
             </a:fld>
             <a:endParaRPr lang="en-US"/>
           </a:p>
@@ -12271,7 +12271,7 @@
           <a:p>
             <a:fld id="{5BCAD085-E8A6-8845-BD4E-CB4CCA059FC4}" type="datetimeFigureOut">
               <a:rPr lang="en-US" smtClean="0"/>
-              <a:t>8/30/2026</a:t>
+              <a:t>9/13/2026</a:t>
             </a:fld>
             <a:endParaRPr lang="en-US"/>
           </a:p>
@@ -12558,7 +12558,7 @@
           <a:p>
             <a:fld id="{5BCAD085-E8A6-8845-BD4E-CB4CCA059FC4}" type="datetimeFigureOut">
               <a:rPr lang="en-US" smtClean="0"/>
-              <a:t>8/30/2026</a:t>
+              <a:t>9/13/2026</a:t>
             </a:fld>
             <a:endParaRPr lang="en-US"/>
           </a:p>
@@ -13012,7 +13012,7 @@
           <a:p>
             <a:fld id="{5BCAD085-E8A6-8845-BD4E-CB4CCA059FC4}" type="datetimeFigureOut">
               <a:rPr lang="en-US" smtClean="0"/>
-              <a:t>8/30/2026</a:t>
+              <a:t>9/13/2026</a:t>
             </a:fld>
             <a:endParaRPr lang="en-US"/>
           </a:p>
@@ -13608,7 +13608,7 @@
           <a:p>
             <a:fld id="{5BCAD085-E8A6-8845-BD4E-CB4CCA059FC4}" type="datetimeFigureOut">
               <a:rPr lang="en-US" smtClean="0"/>
-              <a:t>8/30/2026</a:t>
+              <a:t>9/13/2026</a:t>
             </a:fld>
             <a:endParaRPr lang="en-US"/>
           </a:p>
@@ -13820,7 +13820,7 @@
           <a:p>
             <a:fld id="{5BCAD085-E8A6-8845-BD4E-CB4CCA059FC4}" type="datetimeFigureOut">
               <a:rPr lang="en-US" smtClean="0"/>
-              <a:t>8/30/2026</a:t>
+              <a:t>9/13/2026</a:t>
             </a:fld>
             <a:endParaRPr lang="en-US"/>
           </a:p>
@@ -14294,7 +14294,7 @@
           <a:p>
             <a:fld id="{5BCAD085-E8A6-8845-BD4E-CB4CCA059FC4}" type="datetimeFigureOut">
               <a:rPr lang="en-US" smtClean="0"/>
-              <a:t>8/30/2026</a:t>
+              <a:t>9/13/2026</a:t>
             </a:fld>
             <a:endParaRPr lang="en-US"/>
           </a:p>
@@ -14583,7 +14583,7 @@
           <a:p>
             <a:fld id="{5BCAD085-E8A6-8845-BD4E-CB4CCA059FC4}" type="datetimeFigureOut">
               <a:rPr lang="en-US" smtClean="0"/>
-              <a:t>8/30/2026</a:t>
+              <a:t>9/13/2026</a:t>
             </a:fld>
             <a:endParaRPr lang="en-US"/>
           </a:p>
@@ -15185,7 +15185,7 @@
           <a:p>
             <a:fld id="{5BCAD085-E8A6-8845-BD4E-CB4CCA059FC4}" type="datetimeFigureOut">
               <a:rPr lang="en-US" smtClean="0"/>
-              <a:t>8/30/2026</a:t>
+              <a:t>9/13/2026</a:t>
             </a:fld>
             <a:endParaRPr lang="en-US"/>
           </a:p>
@@ -15762,7 +15762,7 @@
           <a:p>
             <a:fld id="{5BCAD085-E8A6-8845-BD4E-CB4CCA059FC4}" type="datetimeFigureOut">
               <a:rPr lang="en-US" smtClean="0"/>
-              <a:t>8/30/2026</a:t>
+              <a:t>9/13/2026</a:t>
             </a:fld>
             <a:endParaRPr lang="en-US"/>
           </a:p>
@@ -16100,7 +16100,7 @@
           <a:p>
             <a:fld id="{5BCAD085-E8A6-8845-BD4E-CB4CCA059FC4}" type="datetimeFigureOut">
               <a:rPr lang="en-US" smtClean="0"/>
-              <a:t>8/30/2026</a:t>
+              <a:t>9/13/2026</a:t>
             </a:fld>
             <a:endParaRPr lang="en-US"/>
           </a:p>
@@ -16569,7 +16569,7 @@
           <a:p>
             <a:fld id="{5BCAD085-E8A6-8845-BD4E-CB4CCA059FC4}" type="datetimeFigureOut">
               <a:rPr lang="en-US" smtClean="0"/>
-              <a:t>8/30/2026</a:t>
+              <a:t>9/13/2026</a:t>
             </a:fld>
             <a:endParaRPr lang="en-US"/>
           </a:p>
@@ -16890,7 +16890,7 @@
           <a:p>
             <a:fld id="{5BCAD085-E8A6-8845-BD4E-CB4CCA059FC4}" type="datetimeFigureOut">
               <a:rPr lang="en-US" smtClean="0"/>
-              <a:t>8/30/2026</a:t>
+              <a:t>9/13/2026</a:t>
             </a:fld>
             <a:endParaRPr lang="en-US"/>
           </a:p>
@@ -17129,7 +17129,7 @@
           <a:p>
             <a:fld id="{5BCAD085-E8A6-8845-BD4E-CB4CCA059FC4}" type="datetimeFigureOut">
               <a:rPr lang="en-US" smtClean="0"/>
-              <a:t>8/30/2026</a:t>
+              <a:t>9/13/2026</a:t>
             </a:fld>
             <a:endParaRPr lang="en-US"/>
           </a:p>
@@ -17518,7 +17518,7 @@
           <a:p>
             <a:fld id="{5BCAD085-E8A6-8845-BD4E-CB4CCA059FC4}" type="datetimeFigureOut">
               <a:rPr lang="en-US" smtClean="0"/>
-              <a:t>8/30/2026</a:t>
+              <a:t>9/13/2026</a:t>
             </a:fld>
             <a:endParaRPr lang="en-US"/>
           </a:p>
@@ -18051,7 +18051,7 @@
           <a:p>
             <a:fld id="{5BCAD085-E8A6-8845-BD4E-CB4CCA059FC4}" type="datetimeFigureOut">
               <a:rPr lang="en-US" smtClean="0"/>
-              <a:t>8/30/2026</a:t>
+              <a:t>9/13/2026</a:t>
             </a:fld>
             <a:endParaRPr lang="en-US"/>
           </a:p>
@@ -18164,7 +18164,7 @@
           <a:p>
             <a:fld id="{5BCAD085-E8A6-8845-BD4E-CB4CCA059FC4}" type="datetimeFigureOut">
               <a:rPr lang="en-US" smtClean="0"/>
-              <a:t>8/30/2026</a:t>
+              <a:t>9/13/2026</a:t>
             </a:fld>
             <a:endParaRPr lang="en-US"/>
           </a:p>
@@ -18448,7 +18448,7 @@
           <a:p>
             <a:fld id="{5BCAD085-E8A6-8845-BD4E-CB4CCA059FC4}" type="datetimeFigureOut">
               <a:rPr lang="en-US" smtClean="0"/>
-              <a:t>8/30/2026</a:t>
+              <a:t>9/13/2026</a:t>
             </a:fld>
             <a:endParaRPr lang="en-US"/>
           </a:p>
@@ -18849,7 +18849,7 @@
           <a:p>
             <a:fld id="{5BCAD085-E8A6-8845-BD4E-CB4CCA059FC4}" type="datetimeFigureOut">
               <a:rPr lang="en-US" smtClean="0"/>
-              <a:t>8/30/2026</a:t>
+              <a:t>9/13/2026</a:t>
             </a:fld>
             <a:endParaRPr lang="en-US"/>
           </a:p>
@@ -19157,7 +19157,7 @@
           <a:p>
             <a:fld id="{5BCAD085-E8A6-8845-BD4E-CB4CCA059FC4}" type="datetimeFigureOut">
               <a:rPr lang="en-US" smtClean="0"/>
-              <a:t>8/30/2026</a:t>
+              <a:t>9/13/2026</a:t>
             </a:fld>
             <a:endParaRPr lang="en-US"/>
           </a:p>
@@ -19508,7 +19508,7 @@
           <a:p>
             <a:fld id="{5BCAD085-E8A6-8845-BD4E-CB4CCA059FC4}" type="datetimeFigureOut">
               <a:rPr lang="en-US" smtClean="0"/>
-              <a:t>8/30/2026</a:t>
+              <a:t>9/13/2026</a:t>
             </a:fld>
             <a:endParaRPr lang="en-US"/>
           </a:p>
@@ -19855,7 +19855,7 @@
           <a:p>
             <a:fld id="{5BCAD085-E8A6-8845-BD4E-CB4CCA059FC4}" type="datetimeFigureOut">
               <a:rPr lang="en-US" smtClean="0"/>
-              <a:t>8/30/2026</a:t>
+              <a:t>9/13/2026</a:t>
             </a:fld>
             <a:endParaRPr lang="en-US"/>
           </a:p>
@@ -20430,7 +20430,7 @@
           <a:p>
             <a:fld id="{5BCAD085-E8A6-8845-BD4E-CB4CCA059FC4}" type="datetimeFigureOut">
               <a:rPr lang="en-US" smtClean="0"/>
-              <a:t>8/30/2026</a:t>
+              <a:t>9/13/2026</a:t>
             </a:fld>
             <a:endParaRPr lang="en-US"/>
           </a:p>
@@ -24643,7 +24643,7 @@
           <a:p>
             <a:pPr algn="just"/>
             <a:r>
-              <a:rPr sz="1200" b="1">
+              <a:rPr sz="1200" b="1" dirty="0">
                 <a:solidFill>
                   <a:srgbClr val="122A46"/>
                 </a:solidFill>
@@ -24655,7 +24655,7 @@
           <a:p>
             <a:pPr algn="just"/>
             <a:r>
-              <a:rPr sz="1200">
+              <a:rPr sz="1200" dirty="0">
                 <a:solidFill>
                   <a:srgbClr val="5C6A7A"/>
                 </a:solidFill>
@@ -25346,7 +25346,7 @@
         </p:nvSpPr>
         <p:spPr>
           <a:xfrm>
-            <a:off x="731520" y="4937760"/>
+            <a:off x="731520" y="4828032"/>
             <a:ext cx="3246120" cy="731520"/>
           </a:xfrm>
           <a:prstGeom prst="roundRect">
@@ -25412,7 +25412,7 @@
         </p:nvSpPr>
         <p:spPr>
           <a:xfrm>
-            <a:off x="4480560" y="4937760"/>
+            <a:off x="4480560" y="4828032"/>
             <a:ext cx="3246120" cy="731520"/>
           </a:xfrm>
           <a:prstGeom prst="roundRect">
@@ -25478,7 +25478,7 @@
         </p:nvSpPr>
         <p:spPr>
           <a:xfrm>
-            <a:off x="8229600" y="4937760"/>
+            <a:off x="8229600" y="4828032"/>
             <a:ext cx="3246120" cy="731520"/>
           </a:xfrm>
           <a:prstGeom prst="roundRect">
@@ -25567,6 +25567,110 @@
                 <a:latin typeface="Times New Roman"/>
               </a:rPr>
               <a:t>AI Operations Assistant • Ajay Kumar | 3</a:t>
+            </a:r>
+          </a:p>
+        </p:txBody>
+      </p:sp>
+      <p:sp>
+        <p:nvSpPr>
+          <p:cNvPr id="28" name="TextBox 27">
+            <a:extLst>
+              <a:ext uri="{FF2B5EF4-FFF2-40B4-BE49-F238E27FC236}">
+                <a16:creationId xmlns:a16="http://schemas.microsoft.com/office/drawing/2014/main" id="{02A7BF7C-D5E2-B83C-89B2-A61C0143CB25}"/>
+              </a:ext>
+            </a:extLst>
+          </p:cNvPr>
+          <p:cNvSpPr txBox="1"/>
+          <p:nvPr/>
+        </p:nvSpPr>
+        <p:spPr>
+          <a:xfrm>
+            <a:off x="731520" y="5756922"/>
+            <a:ext cx="10835640" cy="707886"/>
+          </a:xfrm>
+          <a:prstGeom prst="rect">
+            <a:avLst/>
+          </a:prstGeom>
+          <a:noFill/>
+        </p:spPr>
+        <p:txBody>
+          <a:bodyPr wrap="square">
+            <a:spAutoFit/>
+          </a:bodyPr>
+          <a:lstStyle/>
+          <a:p>
+            <a:r>
+              <a:rPr lang="en-IN" sz="1000" b="1" dirty="0">
+                <a:solidFill>
+                  <a:schemeClr val="bg1"/>
+                </a:solidFill>
+                <a:latin typeface="Times New Roman" panose="02020603050405020304" pitchFamily="18" charset="0"/>
+                <a:cs typeface="Times New Roman" panose="02020603050405020304" pitchFamily="18" charset="0"/>
+              </a:rPr>
+              <a:t>Note: </a:t>
+            </a:r>
+            <a:r>
+              <a:rPr lang="en-IN" sz="1000" dirty="0">
+                <a:solidFill>
+                  <a:schemeClr val="bg1"/>
+                </a:solidFill>
+                <a:latin typeface="Times New Roman" panose="02020603050405020304" pitchFamily="18" charset="0"/>
+                <a:cs typeface="Times New Roman" panose="02020603050405020304" pitchFamily="18" charset="0"/>
+              </a:rPr>
+              <a:t>Passwords are hashed with PBKDF2-HMAC-SHA256 using a random 16-byte salt and 390,000 iterations, then stored in SQLite’s </a:t>
+            </a:r>
+            <a:r>
+              <a:rPr lang="en-IN" sz="1000" dirty="0" err="1">
+                <a:solidFill>
+                  <a:schemeClr val="bg1"/>
+                </a:solidFill>
+                <a:latin typeface="Times New Roman" panose="02020603050405020304" pitchFamily="18" charset="0"/>
+                <a:cs typeface="Times New Roman" panose="02020603050405020304" pitchFamily="18" charset="0"/>
+              </a:rPr>
+              <a:t>employees.password_hash</a:t>
+            </a:r>
+            <a:r>
+              <a:rPr lang="en-IN" sz="1000" dirty="0">
+                <a:solidFill>
+                  <a:schemeClr val="bg1"/>
+                </a:solidFill>
+                <a:latin typeface="Times New Roman" panose="02020603050405020304" pitchFamily="18" charset="0"/>
+                <a:cs typeface="Times New Roman" panose="02020603050405020304" pitchFamily="18" charset="0"/>
+              </a:rPr>
+              <a:t> column as:</a:t>
+            </a:r>
+          </a:p>
+          <a:p>
+            <a:r>
+              <a:rPr lang="en-IN" sz="1000" dirty="0">
+                <a:solidFill>
+                  <a:schemeClr val="bg1"/>
+                </a:solidFill>
+                <a:latin typeface="Times New Roman" panose="02020603050405020304" pitchFamily="18" charset="0"/>
+                <a:cs typeface="Times New Roman" panose="02020603050405020304" pitchFamily="18" charset="0"/>
+              </a:rPr>
+              <a:t>pbkdf2_sha256$390000$salt_b64$digest_b64</a:t>
+            </a:r>
+          </a:p>
+          <a:p>
+            <a:endParaRPr lang="en-IN" sz="1000" dirty="0">
+              <a:solidFill>
+                <a:schemeClr val="bg1"/>
+              </a:solidFill>
+              <a:latin typeface="Times New Roman" panose="02020603050405020304" pitchFamily="18" charset="0"/>
+              <a:cs typeface="Times New Roman" panose="02020603050405020304" pitchFamily="18" charset="0"/>
+            </a:endParaRPr>
+          </a:p>
+          <a:p>
+            <a:r>
+              <a:rPr lang="en-IN" sz="1000" dirty="0">
+                <a:solidFill>
+                  <a:schemeClr val="bg1"/>
+                </a:solidFill>
+                <a:latin typeface="Times New Roman" panose="02020603050405020304" pitchFamily="18" charset="0"/>
+                <a:cs typeface="Times New Roman" panose="02020603050405020304" pitchFamily="18" charset="0"/>
+              </a:rPr>
+              <a:t>That’s implemented in utils/auth.py:11-33, and the app saves the hash on signup/password reset in app.py:719-763 and app.py:808-819.</a:t>
             </a:r>
           </a:p>
         </p:txBody>
